--- a/templates/carousels/posts/06-10-2026-tue-carla-portugal.pptx
+++ b/templates/carousels/posts/06-10-2026-tue-carla-portugal.pptx
@@ -3585,7 +3585,7 @@
     <p:bg>
       <p:bgPr>
         <a:solidFill>
-          <a:srgbClr val="F4F1EA"/>
+          <a:srgbClr val="F3F1EA"/>
         </a:solidFill>
         <a:effectLst/>
       </p:bgPr>
@@ -3614,7 +3614,7 @@
             </a:avLst>
           </a:prstGeom>
           <a:solidFill>
-            <a:srgbClr val="A7B097"/>
+            <a:srgbClr val="B1BCB1"/>
           </a:solidFill>
           <a:ln>
             <a:noFill/>
@@ -3669,7 +3669,7 @@
             <a:r>
               <a:rPr sz="3000" b="1" i="0">
                 <a:solidFill>
-                  <a:srgbClr val="22371F"/>
+                  <a:srgbClr val="1E3F1D"/>
                 </a:solidFill>
                 <a:latin typeface="Montserrat"/>
               </a:rPr>
@@ -3704,7 +3704,7 @@
             <a:r>
               <a:rPr sz="3300" b="1" i="0">
                 <a:solidFill>
-                  <a:srgbClr val="C9A227"/>
+                  <a:srgbClr val="D39C48"/>
                 </a:solidFill>
                 <a:latin typeface="Montserrat"/>
               </a:rPr>
@@ -3739,7 +3739,7 @@
             <a:r>
               <a:rPr sz="6300" b="1" i="0">
                 <a:solidFill>
-                  <a:srgbClr val="156826"/>
+                  <a:srgbClr val="31662F"/>
                 </a:solidFill>
                 <a:latin typeface="Montserrat"/>
               </a:rPr>
@@ -3774,7 +3774,7 @@
             <a:r>
               <a:rPr sz="3600" b="0" i="0">
                 <a:solidFill>
-                  <a:srgbClr val="22371F"/>
+                  <a:srgbClr val="1E3F1D"/>
                 </a:solidFill>
                 <a:latin typeface="Source Sans 3"/>
               </a:rPr>
@@ -3833,7 +3833,7 @@
             <a:avLst/>
           </a:prstGeom>
           <a:solidFill>
-            <a:srgbClr val="156826"/>
+            <a:srgbClr val="31662F"/>
           </a:solidFill>
           <a:ln>
             <a:noFill/>
@@ -3877,7 +3877,7 @@
             <a:avLst/>
           </a:prstGeom>
           <a:solidFill>
-            <a:srgbClr val="A7B097"/>
+            <a:srgbClr val="B1BCB1"/>
           </a:solidFill>
           <a:ln>
             <a:noFill/>
@@ -3920,7 +3920,7 @@
     <p:bg>
       <p:bgPr>
         <a:solidFill>
-          <a:srgbClr val="F4F1EA"/>
+          <a:srgbClr val="F3F1EA"/>
         </a:solidFill>
         <a:effectLst/>
       </p:bgPr>
@@ -3949,7 +3949,7 @@
             </a:avLst>
           </a:prstGeom>
           <a:solidFill>
-            <a:srgbClr val="A7B097"/>
+            <a:srgbClr val="B1BCB1"/>
           </a:solidFill>
           <a:ln>
             <a:noFill/>
@@ -4004,7 +4004,7 @@
             <a:r>
               <a:rPr sz="3000" b="1" i="0">
                 <a:solidFill>
-                  <a:srgbClr val="22371F"/>
+                  <a:srgbClr val="1E3F1D"/>
                 </a:solidFill>
                 <a:latin typeface="Montserrat"/>
               </a:rPr>
@@ -4039,7 +4039,7 @@
             <a:r>
               <a:rPr sz="3300" b="1" i="0">
                 <a:solidFill>
-                  <a:srgbClr val="156826"/>
+                  <a:srgbClr val="31662F"/>
                 </a:solidFill>
                 <a:latin typeface="Montserrat"/>
               </a:rPr>
@@ -4074,7 +4074,7 @@
             <a:r>
               <a:rPr sz="5700" b="0" i="0">
                 <a:solidFill>
-                  <a:srgbClr val="22371F"/>
+                  <a:srgbClr val="1E3F1D"/>
                 </a:solidFill>
                 <a:latin typeface="Source Sans 3"/>
               </a:rPr>
@@ -4133,7 +4133,7 @@
             <a:avLst/>
           </a:prstGeom>
           <a:solidFill>
-            <a:srgbClr val="A7B097"/>
+            <a:srgbClr val="B1BCB1"/>
           </a:solidFill>
           <a:ln>
             <a:noFill/>
@@ -4177,7 +4177,7 @@
             <a:avLst/>
           </a:prstGeom>
           <a:solidFill>
-            <a:srgbClr val="156826"/>
+            <a:srgbClr val="31662F"/>
           </a:solidFill>
           <a:ln>
             <a:noFill/>
